--- a/media/exports/reports/2026-04/growth-services.pptx
+++ b/media/exports/reports/2026-04/growth-services.pptx
@@ -231,61 +231,61 @@
                 <c:formatCode>$#,##0;[Red]($#,##0);"-"</c:formatCode>
                 <c:ptCount val="19"/>
                 <c:pt idx="0">
-                  <c:v>94520</c:v>
+                  <c:v>103550</c:v>
                 </c:pt>
                 <c:pt idx="1">
-                  <c:v>108140</c:v>
+                  <c:v>118390</c:v>
                 </c:pt>
                 <c:pt idx="2">
-                  <c:v>114895</c:v>
+                  <c:v>125715</c:v>
                 </c:pt>
                 <c:pt idx="3">
-                  <c:v>88250</c:v>
+                  <c:v>96560</c:v>
                 </c:pt>
                 <c:pt idx="4">
-                  <c:v>111010</c:v>
+                  <c:v>121275</c:v>
                 </c:pt>
                 <c:pt idx="5">
-                  <c:v>77175</c:v>
+                  <c:v>84340</c:v>
                 </c:pt>
                 <c:pt idx="6">
-                  <c:v>63970</c:v>
+                  <c:v>69985</c:v>
                 </c:pt>
                 <c:pt idx="7">
-                  <c:v>95555</c:v>
+                  <c:v>104970</c:v>
                 </c:pt>
                 <c:pt idx="8">
-                  <c:v>90220</c:v>
+                  <c:v>99060</c:v>
                 </c:pt>
                 <c:pt idx="9">
-                  <c:v>86320</c:v>
+                  <c:v>94805</c:v>
                 </c:pt>
                 <c:pt idx="10">
-                  <c:v>61475</c:v>
+                  <c:v>67745</c:v>
                 </c:pt>
                 <c:pt idx="11">
-                  <c:v>59535</c:v>
+                  <c:v>65650</c:v>
                 </c:pt>
                 <c:pt idx="12">
-                  <c:v>71260</c:v>
+                  <c:v>78550</c:v>
                 </c:pt>
                 <c:pt idx="13">
-                  <c:v>83940</c:v>
+                  <c:v>92575</c:v>
                 </c:pt>
                 <c:pt idx="14">
-                  <c:v>69420</c:v>
+                  <c:v>76600</c:v>
                 </c:pt>
                 <c:pt idx="15">
-                  <c:v>92370</c:v>
+                  <c:v>102350</c:v>
                 </c:pt>
                 <c:pt idx="16">
-                  <c:v>100055</c:v>
+                  <c:v>110835</c:v>
                 </c:pt>
                 <c:pt idx="17">
-                  <c:v>109865</c:v>
+                  <c:v>121215</c:v>
                 </c:pt>
                 <c:pt idx="18">
-                  <c:v>80590</c:v>
+                  <c:v>88665</c:v>
                 </c:pt>
               </c:numCache>
             </c:numRef>
@@ -334,7 +334,7 @@
         <c:axId val="-2100718248"/>
         <c:scaling>
           <c:orientation val="minMax"/>
-          <c:max val="125000.0"/>
+          <c:max val="150000.0"/>
           <c:min val="0.0"/>
         </c:scaling>
         <c:delete val="0"/>
@@ -369,7 +369,7 @@
         <c:crossAx val="-2101159928"/>
         <c:crosses val="autoZero"/>
         <c:crossBetween val="midCat"/>
-        <c:majorUnit val="25000.0"/>
+        <c:majorUnit val="50000.0"/>
       </c:valAx>
     </c:plotArea>
     <c:plotVisOnly val="1"/>
@@ -513,61 +513,61 @@
                 <c:formatCode>$#,##0;[Red]($#,##0);"-"</c:formatCode>
                 <c:ptCount val="19"/>
                 <c:pt idx="0">
-                  <c:v>70720</c:v>
+                  <c:v>77350</c:v>
                 </c:pt>
                 <c:pt idx="1">
-                  <c:v>88540</c:v>
+                  <c:v>96790</c:v>
                 </c:pt>
                 <c:pt idx="2">
-                  <c:v>94695</c:v>
+                  <c:v>103515</c:v>
                 </c:pt>
                 <c:pt idx="3">
-                  <c:v>66850</c:v>
+                  <c:v>73060</c:v>
                 </c:pt>
                 <c:pt idx="4">
-                  <c:v>84410</c:v>
+                  <c:v>92075</c:v>
                 </c:pt>
                 <c:pt idx="5">
-                  <c:v>48975</c:v>
+                  <c:v>53340</c:v>
                 </c:pt>
                 <c:pt idx="6">
-                  <c:v>37570</c:v>
+                  <c:v>40885</c:v>
                 </c:pt>
                 <c:pt idx="7">
-                  <c:v>59755</c:v>
+                  <c:v>65570</c:v>
                 </c:pt>
                 <c:pt idx="8">
-                  <c:v>64520</c:v>
+                  <c:v>70760</c:v>
                 </c:pt>
                 <c:pt idx="9">
-                  <c:v>64820</c:v>
+                  <c:v>71205</c:v>
                 </c:pt>
                 <c:pt idx="10">
-                  <c:v>38775</c:v>
+                  <c:v>42845</c:v>
                 </c:pt>
                 <c:pt idx="11">
-                  <c:v>38035</c:v>
+                  <c:v>42050</c:v>
                 </c:pt>
                 <c:pt idx="12">
-                  <c:v>45860</c:v>
+                  <c:v>50650</c:v>
                 </c:pt>
                 <c:pt idx="13">
-                  <c:v>46840</c:v>
+                  <c:v>51775</c:v>
                 </c:pt>
                 <c:pt idx="14">
-                  <c:v>29520</c:v>
+                  <c:v>32800</c:v>
                 </c:pt>
                 <c:pt idx="15">
-                  <c:v>60170</c:v>
+                  <c:v>66950</c:v>
                 </c:pt>
                 <c:pt idx="16">
-                  <c:v>62955</c:v>
+                  <c:v>70035</c:v>
                 </c:pt>
                 <c:pt idx="17">
-                  <c:v>75165</c:v>
+                  <c:v>83115</c:v>
                 </c:pt>
                 <c:pt idx="18">
-                  <c:v>47090</c:v>
+                  <c:v>51865</c:v>
                 </c:pt>
               </c:numCache>
             </c:numRef>
@@ -616,7 +616,7 @@
         <c:axId val="-2100718248"/>
         <c:scaling>
           <c:orientation val="minMax"/>
-          <c:max val="100000.0"/>
+          <c:max val="125000.0"/>
           <c:min val="0.0"/>
         </c:scaling>
         <c:delete val="0"/>
@@ -651,7 +651,7 @@
         <c:crossAx val="-2101159928"/>
         <c:crosses val="autoZero"/>
         <c:crossBetween val="midCat"/>
-        <c:majorUnit val="20000.0"/>
+        <c:majorUnit val="25000.0"/>
       </c:valAx>
     </c:plotArea>
     <c:plotVisOnly val="1"/>
@@ -795,61 +795,61 @@
                 <c:formatCode>$#,##0;[Red]($#,##0);"-"</c:formatCode>
                 <c:ptCount val="19"/>
                 <c:pt idx="0">
-                  <c:v>15000</c:v>
+                  <c:v>16500</c:v>
                 </c:pt>
                 <c:pt idx="1">
-                  <c:v>15000</c:v>
+                  <c:v>16500</c:v>
                 </c:pt>
                 <c:pt idx="2">
-                  <c:v>15000</c:v>
+                  <c:v>16500</c:v>
                 </c:pt>
                 <c:pt idx="3">
-                  <c:v>15000</c:v>
+                  <c:v>16500</c:v>
                 </c:pt>
                 <c:pt idx="4">
-                  <c:v>15000</c:v>
+                  <c:v>16500</c:v>
                 </c:pt>
                 <c:pt idx="5">
-                  <c:v>21800</c:v>
+                  <c:v>24000</c:v>
                 </c:pt>
                 <c:pt idx="6">
-                  <c:v>21800</c:v>
+                  <c:v>24000</c:v>
                 </c:pt>
                 <c:pt idx="7">
-                  <c:v>21800</c:v>
+                  <c:v>24000</c:v>
                 </c:pt>
                 <c:pt idx="8">
-                  <c:v>21800</c:v>
+                  <c:v>24000</c:v>
                 </c:pt>
                 <c:pt idx="9">
-                  <c:v>16300</c:v>
+                  <c:v>17900</c:v>
                 </c:pt>
                 <c:pt idx="10">
-                  <c:v>16300</c:v>
+                  <c:v>17900</c:v>
                 </c:pt>
                 <c:pt idx="11">
-                  <c:v>16300</c:v>
+                  <c:v>17900</c:v>
                 </c:pt>
                 <c:pt idx="12">
-                  <c:v>16300</c:v>
+                  <c:v>17900</c:v>
                 </c:pt>
                 <c:pt idx="13">
-                  <c:v>28300</c:v>
+                  <c:v>31100</c:v>
                 </c:pt>
                 <c:pt idx="14">
-                  <c:v>28300</c:v>
+                  <c:v>31100</c:v>
                 </c:pt>
                 <c:pt idx="15">
-                  <c:v>28300</c:v>
+                  <c:v>31100</c:v>
                 </c:pt>
                 <c:pt idx="16">
-                  <c:v>28300</c:v>
+                  <c:v>31100</c:v>
                 </c:pt>
                 <c:pt idx="17">
-                  <c:v>28300</c:v>
+                  <c:v>31100</c:v>
                 </c:pt>
                 <c:pt idx="18">
-                  <c:v>28300</c:v>
+                  <c:v>31100</c:v>
                 </c:pt>
               </c:numCache>
             </c:numRef>
@@ -898,7 +898,7 @@
         <c:axId val="-2100718248"/>
         <c:scaling>
           <c:orientation val="minMax"/>
-          <c:max val="30000.0"/>
+          <c:max val="40000.0"/>
           <c:min val="0.0"/>
         </c:scaling>
         <c:delete val="0"/>
@@ -1077,61 +1077,61 @@
                 <c:formatCode>$#,##0;[Red]($#,##0);"-"</c:formatCode>
                 <c:ptCount val="19"/>
                 <c:pt idx="0">
-                  <c:v>8800</c:v>
+                  <c:v>9700</c:v>
                 </c:pt>
                 <c:pt idx="1">
-                  <c:v>4600</c:v>
+                  <c:v>5100</c:v>
                 </c:pt>
                 <c:pt idx="2">
-                  <c:v>5200</c:v>
+                  <c:v>5700</c:v>
                 </c:pt>
                 <c:pt idx="3">
-                  <c:v>6400</c:v>
+                  <c:v>7000</c:v>
                 </c:pt>
                 <c:pt idx="4">
-                  <c:v>11600</c:v>
+                  <c:v>12700</c:v>
                 </c:pt>
                 <c:pt idx="5">
-                  <c:v>6400</c:v>
+                  <c:v>7000</c:v>
                 </c:pt>
                 <c:pt idx="6">
-                  <c:v>4600</c:v>
+                  <c:v>5100</c:v>
                 </c:pt>
                 <c:pt idx="7">
-                  <c:v>14000</c:v>
+                  <c:v>15400</c:v>
                 </c:pt>
                 <c:pt idx="8">
-                  <c:v>3900</c:v>
+                  <c:v>4300</c:v>
                 </c:pt>
                 <c:pt idx="9">
-                  <c:v>5200</c:v>
+                  <c:v>5700</c:v>
                 </c:pt>
                 <c:pt idx="10">
-                  <c:v>6400</c:v>
+                  <c:v>7000</c:v>
                 </c:pt>
                 <c:pt idx="11">
-                  <c:v>5200</c:v>
+                  <c:v>5700</c:v>
                 </c:pt>
                 <c:pt idx="12">
-                  <c:v>9100</c:v>
+                  <c:v>10000</c:v>
                 </c:pt>
                 <c:pt idx="13">
-                  <c:v>8800</c:v>
+                  <c:v>9700</c:v>
                 </c:pt>
                 <c:pt idx="14">
-                  <c:v>11600</c:v>
+                  <c:v>12700</c:v>
                 </c:pt>
                 <c:pt idx="15">
-                  <c:v>3900</c:v>
+                  <c:v>4300</c:v>
                 </c:pt>
                 <c:pt idx="16">
-                  <c:v>8800</c:v>
+                  <c:v>9700</c:v>
                 </c:pt>
                 <c:pt idx="17">
-                  <c:v>6400</c:v>
+                  <c:v>7000</c:v>
                 </c:pt>
                 <c:pt idx="18">
-                  <c:v>5200</c:v>
+                  <c:v>5700</c:v>
                 </c:pt>
               </c:numCache>
             </c:numRef>
@@ -1180,7 +1180,7 @@
         <c:axId val="-2100718248"/>
         <c:scaling>
           <c:orientation val="minMax"/>
-          <c:max val="15000.0"/>
+          <c:max val="20000.0"/>
           <c:min val="0.0"/>
         </c:scaling>
         <c:delete val="0"/>
@@ -1705,7 +1705,7 @@
           <a:lstStyle/>
           <a:p>
             <a:r>
-              <a:t>Services · All. April against April last year: 26.0%; Year to date (Jul to Apr 2026): $814,830; Gross margin, year to date: 64.0%. Revenue is $814,830 this financial year to date (Jul to Apr 2026). Training makes the highest gross margin (74.6%); Projects the lowest (61.6%). The business needs 88.6% gross margin just to cover overheads. Projects: 61.6% gross margin, 21.6 points over the 40.0% target ($109,938 ahead on $509,230 this financial year to date). Training: 74.6% gross margin, 34.6 points over the 40.0% target ($24,420 ahead on $70,600 this financial year to date).</a:t>
+              <a:t>Services · All. April against April last year: 26.7%; Year to date (Jul to Apr 2026): $898,990; Gross margin, year to date: 67.4%. Revenue is $898,990 this financial year to date (Jul to Apr 2026). Training makes the highest gross margin (76.9%); Projects the lowest (65.3%). The business needs 89.8% gross margin just to cover overheads. Projects: 65.3% gross margin, 25.3 points over the 40.0% target ($142,374 ahead on $563,290 this financial year to date). Training: 76.9% gross margin, 36.9 points over the 40.0% target ($28,560 ahead on $77,500 this financial year to date).</a:t>
             </a:r>
           </a:p>
         </p:txBody>
@@ -1775,7 +1775,7 @@
           <a:lstStyle/>
           <a:p>
             <a:r>
-              <a:t>Services · Projects. April against April last year: 25.3%; Year to date (Jul to Apr 2026): $509,230; Gross margin, year to date: 61.6%. Projects brought in $509,230 this financial year to date, at a 61.6% gross margin (below the 64.0% overall). Projects: 61.6% gross margin, 21.6 points over the 40.0% target ($109,938 ahead on $509,230 this financial year to date).</a:t>
+              <a:t>Services · Projects. April against April last year: 26.9%; Year to date (Jul to Apr 2026): $563,290; Gross margin, year to date: 65.3%. Projects brought in $563,290 this financial year to date, at a 65.3% gross margin (below the 67.4% overall). Projects: 65.3% gross margin, 25.3 points over the 40.0% target ($142,374 ahead on $563,290 this financial year to date).</a:t>
             </a:r>
           </a:p>
         </p:txBody>
@@ -1845,7 +1845,7 @@
           <a:lstStyle/>
           <a:p>
             <a:r>
-              <a:t>Services · Retainers. April against April last year: 29.8%; Year to date (Jul to Apr 2026): $235,000; Gross margin, year to date: 66.0%. Retainers brought in $235,000 this financial year to date, at a 66.0% gross margin (above the 64.0% overall). Retainers: 66.0% gross margin, 26.0 points over the 40.0% target ($61,200 ahead on $235,000 this financial year to date).</a:t>
+              <a:t>Services · Retainers. April against April last year: 29.6%; Year to date (Jul to Apr 2026): $258,200; Gross margin, year to date: 69.1%. Retainers brought in $258,200 this financial year to date, at a 69.1% gross margin (above the 67.4% overall). Retainers: 69.1% gross margin, 29.1 points over the 40.0% target ($75,120 ahead on $258,200 this financial year to date).</a:t>
             </a:r>
           </a:p>
         </p:txBody>
@@ -1915,7 +1915,7 @@
           <a:lstStyle/>
           <a:p>
             <a:r>
-              <a:t>Services · Training. April against April last year: 13.0%; Year to date (Jul to Apr 2026): $70,600; Gross margin, year to date: 74.6%. Training brought in $70,600 this financial year to date, at a 74.6% gross margin (above the 64.0% overall). Training: 74.6% gross margin, 34.6 points over the 40.0% target ($24,420 ahead on $70,600 this financial year to date).</a:t>
+              <a:t>Services · Training. April against April last year: 11.8%; Year to date (Jul to Apr 2026): $77,500; Gross margin, year to date: 76.9%. Training brought in $77,500 this financial year to date, at a 76.9% gross margin (above the 67.4% overall). Training: 76.9% gross margin, 36.9 points over the 40.0% target ($28,560 ahead on $77,500 this financial year to date).</a:t>
             </a:r>
           </a:p>
         </p:txBody>
@@ -1985,7 +1985,7 @@
           <a:lstStyle/>
           <a:p>
             <a:r>
-              <a:t>By type of work: financial year to date (Jul to Apr 2026) against the same period last year · Services. Same period last year: Not available: the data starts October 2024. From gross margin to profit: April's client work made $52,730 gross margin (65.4%). Consultant time not charged to client work took $19,740 and overheads $51,660, leaving ($18,670) profit before tax ((23.2%) of revenue). To cover overheads, client work needs a 88.6% gross margin on average.</a:t>
+              <a:t>By type of work: financial year to date (Jul to Apr 2026) against the same period last year · Services. Same period last year: Not available: the data starts October 2024. From gross margin to profit: April's client work made $60,805 gross margin (68.6%). Consultant time not charged to client work took $27,960 and overheads $51,660, leaving ($18,815) profit before tax ((21.2%) of revenue). To cover overheads, client work needs a 89.8% gross margin on average.</a:t>
             </a:r>
           </a:p>
         </p:txBody>
@@ -5400,7 +5400,7 @@
                 </a:solidFill>
                 <a:latin typeface="Roboto"/>
               </a:rPr>
-              <a:t>Data retrieved 2pm, Tue 6 Oct 2026 · Generated 8 Oct 2026, 9:35am · Sample data · Made with Python (python-pptx)</a:t>
+              <a:t>Data retrieved 2pm, Tue 6 Oct 2026 · Generated 9 Oct 2026, 8:41am · Sample data · Made with Python (python-pptx)</a:t>
             </a:r>
           </a:p>
         </p:txBody>
@@ -5746,7 +5746,7 @@
                 </a:solidFill>
                 <a:latin typeface="Roboto"/>
               </a:rPr>
-              <a:t>26.0%</a:t>
+              <a:t>26.7%</a:t>
             </a:r>
           </a:p>
         </p:txBody>
@@ -5785,7 +5785,7 @@
                 </a:solidFill>
                 <a:latin typeface="Roboto"/>
               </a:rPr>
-              <a:t>$80,590 against $63,970</a:t>
+              <a:t>$88,665 against $69,985</a:t>
             </a:r>
           </a:p>
         </p:txBody>
@@ -5912,7 +5912,7 @@
                 </a:solidFill>
                 <a:latin typeface="Roboto"/>
               </a:rPr>
-              <a:t>$814,830</a:t>
+              <a:t>$898,990</a:t>
             </a:r>
           </a:p>
         </p:txBody>
@@ -6078,7 +6078,7 @@
                 </a:solidFill>
                 <a:latin typeface="Roboto"/>
               </a:rPr>
-              <a:t>64.0%</a:t>
+              <a:t>67.4%</a:t>
             </a:r>
           </a:p>
         </p:txBody>
@@ -6117,7 +6117,7 @@
                 </a:solidFill>
                 <a:latin typeface="Roboto"/>
               </a:rPr>
-              <a:t>$521,490 before overheads</a:t>
+              <a:t>$605,650 before overheads</a:t>
             </a:r>
           </a:p>
         </p:txBody>
@@ -6262,7 +6262,7 @@
                 </a:solidFill>
                 <a:latin typeface="Roboto"/>
               </a:rPr>
-              <a:t>Revenue is $814,830 this financial year to date (Jul to Apr 2026). Training makes the highest gross margin (74.6%); Projects the lowest (61.6%). The business needs 88.6% gross margin just to cover overheads.</a:t>
+              <a:t>Revenue is $898,990 this financial year to date (Jul to Apr 2026). Training makes the highest gross margin (76.9%); Projects the lowest (65.3%). The business needs 89.8% gross margin just to cover overheads.</a:t>
             </a:r>
           </a:p>
         </p:txBody>
@@ -6389,7 +6389,7 @@
                 </a:solidFill>
                 <a:latin typeface="Roboto"/>
               </a:rPr>
-              <a:t>Projects: 61.6% gross margin, 21.6 points over the 40.0% target ($109,938 ahead on $509,230 this financial year to date). Training: 74.6% gross margin, 34.6 points over the 40.0% target ($24,420 ahead on $70,600 this financial year to date).</a:t>
+              <a:t>Projects: 65.3% gross margin, 25.3 points over the 40.0% target ($142,374 ahead on $563,290 this financial year to date). Training: 76.9% gross margin, 36.9 points over the 40.0% target ($28,560 ahead on $77,500 this financial year to date).</a:t>
             </a:r>
           </a:p>
         </p:txBody>
@@ -6467,7 +6467,7 @@
                 </a:solidFill>
                 <a:latin typeface="Roboto"/>
               </a:rPr>
-              <a:t>Data retrieved 2pm, Tue 6 Oct 2026 · Generated 8 Oct 2026, 9:35am · Sample data · Made with Python (python-pptx)</a:t>
+              <a:t>Data retrieved 2pm, Tue 6 Oct 2026 · Generated 9 Oct 2026, 8:41am · Sample data · Made with Python (python-pptx)</a:t>
             </a:r>
           </a:p>
         </p:txBody>
@@ -6813,7 +6813,7 @@
                 </a:solidFill>
                 <a:latin typeface="Roboto"/>
               </a:rPr>
-              <a:t>25.3%</a:t>
+              <a:t>26.9%</a:t>
             </a:r>
           </a:p>
         </p:txBody>
@@ -6852,7 +6852,7 @@
                 </a:solidFill>
                 <a:latin typeface="Roboto"/>
               </a:rPr>
-              <a:t>$47,090 against $37,570</a:t>
+              <a:t>$51,865 against $40,885</a:t>
             </a:r>
           </a:p>
         </p:txBody>
@@ -6979,7 +6979,7 @@
                 </a:solidFill>
                 <a:latin typeface="Roboto"/>
               </a:rPr>
-              <a:t>$509,230</a:t>
+              <a:t>$563,290</a:t>
             </a:r>
           </a:p>
         </p:txBody>
@@ -7145,7 +7145,7 @@
                 </a:solidFill>
                 <a:latin typeface="Roboto"/>
               </a:rPr>
-              <a:t>61.6%</a:t>
+              <a:t>65.3%</a:t>
             </a:r>
           </a:p>
         </p:txBody>
@@ -7184,7 +7184,7 @@
                 </a:solidFill>
                 <a:latin typeface="Roboto"/>
               </a:rPr>
-              <a:t>$313,630 before overheads</a:t>
+              <a:t>$367,690 before overheads</a:t>
             </a:r>
           </a:p>
         </p:txBody>
@@ -7329,7 +7329,7 @@
                 </a:solidFill>
                 <a:latin typeface="Roboto"/>
               </a:rPr>
-              <a:t>Projects brought in $509,230 this financial year to date, at a 61.6% gross margin (below the 64.0% overall).</a:t>
+              <a:t>Projects brought in $563,290 this financial year to date, at a 65.3% gross margin (below the 67.4% overall).</a:t>
             </a:r>
           </a:p>
         </p:txBody>
@@ -7456,7 +7456,7 @@
                 </a:solidFill>
                 <a:latin typeface="Roboto"/>
               </a:rPr>
-              <a:t>Projects: 61.6% gross margin, 21.6 points over the 40.0% target ($109,938 ahead on $509,230 this financial year to date).</a:t>
+              <a:t>Projects: 65.3% gross margin, 25.3 points over the 40.0% target ($142,374 ahead on $563,290 this financial year to date).</a:t>
             </a:r>
           </a:p>
         </p:txBody>
@@ -7534,7 +7534,7 @@
                 </a:solidFill>
                 <a:latin typeface="Roboto"/>
               </a:rPr>
-              <a:t>Data retrieved 2pm, Tue 6 Oct 2026 · Generated 8 Oct 2026, 9:35am · Sample data · Made with Python (python-pptx)</a:t>
+              <a:t>Data retrieved 2pm, Tue 6 Oct 2026 · Generated 9 Oct 2026, 8:41am · Sample data · Made with Python (python-pptx)</a:t>
             </a:r>
           </a:p>
         </p:txBody>
@@ -7880,7 +7880,7 @@
                 </a:solidFill>
                 <a:latin typeface="Roboto"/>
               </a:rPr>
-              <a:t>29.8%</a:t>
+              <a:t>29.6%</a:t>
             </a:r>
           </a:p>
         </p:txBody>
@@ -7919,7 +7919,7 @@
                 </a:solidFill>
                 <a:latin typeface="Roboto"/>
               </a:rPr>
-              <a:t>$28,300 against $21,800</a:t>
+              <a:t>$31,100 against $24,000</a:t>
             </a:r>
           </a:p>
         </p:txBody>
@@ -8046,7 +8046,7 @@
                 </a:solidFill>
                 <a:latin typeface="Roboto"/>
               </a:rPr>
-              <a:t>$235,000</a:t>
+              <a:t>$258,200</a:t>
             </a:r>
           </a:p>
         </p:txBody>
@@ -8212,7 +8212,7 @@
                 </a:solidFill>
                 <a:latin typeface="Roboto"/>
               </a:rPr>
-              <a:t>66.0%</a:t>
+              <a:t>69.1%</a:t>
             </a:r>
           </a:p>
         </p:txBody>
@@ -8251,7 +8251,7 @@
                 </a:solidFill>
                 <a:latin typeface="Roboto"/>
               </a:rPr>
-              <a:t>$155,200 before overheads</a:t>
+              <a:t>$178,400 before overheads</a:t>
             </a:r>
           </a:p>
         </p:txBody>
@@ -8396,7 +8396,7 @@
                 </a:solidFill>
                 <a:latin typeface="Roboto"/>
               </a:rPr>
-              <a:t>Retainers brought in $235,000 this financial year to date, at a 66.0% gross margin (above the 64.0% overall).</a:t>
+              <a:t>Retainers brought in $258,200 this financial year to date, at a 69.1% gross margin (above the 67.4% overall).</a:t>
             </a:r>
           </a:p>
         </p:txBody>
@@ -8523,7 +8523,7 @@
                 </a:solidFill>
                 <a:latin typeface="Roboto"/>
               </a:rPr>
-              <a:t>Retainers: 66.0% gross margin, 26.0 points over the 40.0% target ($61,200 ahead on $235,000 this financial year to date).</a:t>
+              <a:t>Retainers: 69.1% gross margin, 29.1 points over the 40.0% target ($75,120 ahead on $258,200 this financial year to date).</a:t>
             </a:r>
           </a:p>
         </p:txBody>
@@ -8601,7 +8601,7 @@
                 </a:solidFill>
                 <a:latin typeface="Roboto"/>
               </a:rPr>
-              <a:t>Data retrieved 2pm, Tue 6 Oct 2026 · Generated 8 Oct 2026, 9:35am · Sample data · Made with Python (python-pptx)</a:t>
+              <a:t>Data retrieved 2pm, Tue 6 Oct 2026 · Generated 9 Oct 2026, 8:41am · Sample data · Made with Python (python-pptx)</a:t>
             </a:r>
           </a:p>
         </p:txBody>
@@ -8947,7 +8947,7 @@
                 </a:solidFill>
                 <a:latin typeface="Roboto"/>
               </a:rPr>
-              <a:t>13.0%</a:t>
+              <a:t>11.8%</a:t>
             </a:r>
           </a:p>
         </p:txBody>
@@ -8986,7 +8986,7 @@
                 </a:solidFill>
                 <a:latin typeface="Roboto"/>
               </a:rPr>
-              <a:t>$5,200 against $4,600</a:t>
+              <a:t>$5,700 against $5,100</a:t>
             </a:r>
           </a:p>
         </p:txBody>
@@ -9113,7 +9113,7 @@
                 </a:solidFill>
                 <a:latin typeface="Roboto"/>
               </a:rPr>
-              <a:t>$70,600</a:t>
+              <a:t>$77,500</a:t>
             </a:r>
           </a:p>
         </p:txBody>
@@ -9279,7 +9279,7 @@
                 </a:solidFill>
                 <a:latin typeface="Roboto"/>
               </a:rPr>
-              <a:t>74.6%</a:t>
+              <a:t>76.9%</a:t>
             </a:r>
           </a:p>
         </p:txBody>
@@ -9318,7 +9318,7 @@
                 </a:solidFill>
                 <a:latin typeface="Roboto"/>
               </a:rPr>
-              <a:t>$52,660 before overheads</a:t>
+              <a:t>$59,560 before overheads</a:t>
             </a:r>
           </a:p>
         </p:txBody>
@@ -9463,7 +9463,7 @@
                 </a:solidFill>
                 <a:latin typeface="Roboto"/>
               </a:rPr>
-              <a:t>Training brought in $70,600 this financial year to date, at a 74.6% gross margin (above the 64.0% overall).</a:t>
+              <a:t>Training brought in $77,500 this financial year to date, at a 76.9% gross margin (above the 67.4% overall).</a:t>
             </a:r>
           </a:p>
         </p:txBody>
@@ -9590,7 +9590,7 @@
                 </a:solidFill>
                 <a:latin typeface="Roboto"/>
               </a:rPr>
-              <a:t>Training: 74.6% gross margin, 34.6 points over the 40.0% target ($24,420 ahead on $70,600 this financial year to date).</a:t>
+              <a:t>Training: 76.9% gross margin, 36.9 points over the 40.0% target ($28,560 ahead on $77,500 this financial year to date).</a:t>
             </a:r>
           </a:p>
         </p:txBody>
@@ -9668,7 +9668,7 @@
                 </a:solidFill>
                 <a:latin typeface="Roboto"/>
               </a:rPr>
-              <a:t>Data retrieved 2pm, Tue 6 Oct 2026 · Generated 8 Oct 2026, 9:35am · Sample data · Made with Python (python-pptx)</a:t>
+              <a:t>Data retrieved 2pm, Tue 6 Oct 2026 · Generated 9 Oct 2026, 8:41am · Sample data · Made with Python (python-pptx)</a:t>
             </a:r>
           </a:p>
         </p:txBody>
@@ -9887,7 +9887,7 @@
                 </a:solidFill>
                 <a:latin typeface="Roboto"/>
               </a:rPr>
-              <a:t>Same period last year: Not available: the data starts October 2024. From gross margin to profit: April's client work made $52,730 gross margin (65.4%). Consultant time not charged to client work took $19,740 and overheads $51,660, leaving ($18,670) profit before tax ((23.2%) of revenue). To cover overheads, client work needs a 88.6% gross margin on average.</a:t>
+              <a:t>Same period last year: Not available: the data starts October 2024. From gross margin to profit: April's client work made $60,805 gross margin (68.6%). Consultant time not charged to client work took $27,960 and overheads $51,660, leaving ($18,815) profit before tax ((21.2%) of revenue). To cover overheads, client work needs a 89.8% gross margin on average.</a:t>
             </a:r>
           </a:p>
         </p:txBody>
@@ -10118,7 +10118,7 @@
                           </a:solidFill>
                           <a:latin typeface="Roboto"/>
                         </a:rPr>
-                        <a:t>$509,230</a:t>
+                        <a:t>$563,290</a:t>
                       </a:r>
                     </a:p>
                   </a:txBody>
@@ -10199,7 +10199,7 @@
                           </a:solidFill>
                           <a:latin typeface="Roboto"/>
                         </a:rPr>
-                        <a:t>$313,630</a:t>
+                        <a:t>$367,690</a:t>
                       </a:r>
                     </a:p>
                   </a:txBody>
@@ -10226,7 +10226,7 @@
                           </a:solidFill>
                           <a:latin typeface="Roboto"/>
                         </a:rPr>
-                        <a:t>61.6%</a:t>
+                        <a:t>65.3%</a:t>
                       </a:r>
                     </a:p>
                   </a:txBody>
@@ -10282,7 +10282,7 @@
                           </a:solidFill>
                           <a:latin typeface="Roboto"/>
                         </a:rPr>
-                        <a:t>$235,000</a:t>
+                        <a:t>$258,200</a:t>
                       </a:r>
                     </a:p>
                   </a:txBody>
@@ -10363,7 +10363,7 @@
                           </a:solidFill>
                           <a:latin typeface="Roboto"/>
                         </a:rPr>
-                        <a:t>$155,200</a:t>
+                        <a:t>$178,400</a:t>
                       </a:r>
                     </a:p>
                   </a:txBody>
@@ -10390,7 +10390,7 @@
                           </a:solidFill>
                           <a:latin typeface="Roboto"/>
                         </a:rPr>
-                        <a:t>66.0%</a:t>
+                        <a:t>69.1%</a:t>
                       </a:r>
                     </a:p>
                   </a:txBody>
@@ -10446,7 +10446,7 @@
                           </a:solidFill>
                           <a:latin typeface="Roboto"/>
                         </a:rPr>
-                        <a:t>$70,600</a:t>
+                        <a:t>$77,500</a:t>
                       </a:r>
                     </a:p>
                   </a:txBody>
@@ -10527,7 +10527,7 @@
                           </a:solidFill>
                           <a:latin typeface="Roboto"/>
                         </a:rPr>
-                        <a:t>$52,660</a:t>
+                        <a:t>$59,560</a:t>
                       </a:r>
                     </a:p>
                   </a:txBody>
@@ -10554,7 +10554,7 @@
                           </a:solidFill>
                           <a:latin typeface="Roboto"/>
                         </a:rPr>
-                        <a:t>74.6%</a:t>
+                        <a:t>76.9%</a:t>
                       </a:r>
                     </a:p>
                   </a:txBody>
@@ -10610,7 +10610,7 @@
                           </a:solidFill>
                           <a:latin typeface="Roboto"/>
                         </a:rPr>
-                        <a:t>$814,830</a:t>
+                        <a:t>$898,990</a:t>
                       </a:r>
                     </a:p>
                   </a:txBody>
@@ -10691,7 +10691,7 @@
                           </a:solidFill>
                           <a:latin typeface="Roboto"/>
                         </a:rPr>
-                        <a:t>$521,490</a:t>
+                        <a:t>$605,650</a:t>
                       </a:r>
                     </a:p>
                   </a:txBody>
@@ -10718,7 +10718,7 @@
                           </a:solidFill>
                           <a:latin typeface="Roboto"/>
                         </a:rPr>
-                        <a:t>64.0%</a:t>
+                        <a:t>67.4%</a:t>
                       </a:r>
                     </a:p>
                   </a:txBody>
@@ -10806,7 +10806,7 @@
                 </a:solidFill>
                 <a:latin typeface="Roboto"/>
               </a:rPr>
-              <a:t>Data retrieved 2pm, Tue 6 Oct 2026 · Generated 8 Oct 2026, 9:35am · Sample data · Made with Python (python-pptx)</a:t>
+              <a:t>Data retrieved 2pm, Tue 6 Oct 2026 · Generated 9 Oct 2026, 8:41am · Sample data · Made with Python (python-pptx)</a:t>
             </a:r>
           </a:p>
         </p:txBody>
